--- a/outputs/ophthalmology-batch-20261011/ioi/algorithm_editable.pptx
+++ b/outputs/ophthalmology-batch-20261011/ioi/algorithm_editable.pptx
@@ -5233,7 +5233,7 @@
       </p:sp>
       <p:sp>
         <p:nvSpPr>
-          <p:cNvPr id="32" name="所有确诊者缩短复诊，重复查延迟RV/RO；黄斑缺血影响预后，统一增频间隔/疗程未明确。"/>
+          <p:cNvPr id="32" name="所有确诊者缩短复诊间隔，重复查延迟RV/RO；黄斑缺血影响预后，统一增频间隔/疗程未明确。"/>
           <p:cNvSpPr txBox="1"/>
           <p:nvPr/>
         </p:nvSpPr>
@@ -5273,7 +5273,7 @@
                 <a:ea typeface="Microsoft YaHei"/>
                 <a:cs typeface="Microsoft YaHei"/>
               </a:rPr>
-              <a:t>所有确诊者缩短复诊，重复查延迟RV/RO；黄斑缺血影</a:t>
+              <a:t>所有确诊者缩短复诊间隔，重复查延迟RV/RO；黄斑缺</a:t>
             </a:r>
           </a:p>
           <a:p>
@@ -5297,7 +5297,7 @@
                 <a:ea typeface="Microsoft YaHei"/>
                 <a:cs typeface="Microsoft YaHei"/>
               </a:rPr>
-              <a:t>响预后，统一增频间隔/疗程未明确。</a:t>
+              <a:t>血影响预后，统一增频间隔/疗程未明确。</a:t>
             </a:r>
           </a:p>
         </p:txBody>
